--- a/classes/parte-3-estadistica-inferencial/179-anova-one-way-two-way/clase-179-anova-one-way-two-way-presentacion.pptx
+++ b/classes/parte-3-estadistica-inferencial/179-anova-one-way-two-way/clase-179-anova-one-way-two-way-presentacion.pptx
@@ -4845,7 +4845,7 @@
                 </a:solidFill>
                 <a:latin typeface="Segoe UI"/>
               </a:rPr>
-              <a:t>Primer bloque ejecutable del notebook.</a:t>
+              <a:t>H₀: μ₁ = μ₂ = μ₃. Simulamos la masa corporal de 3 especies de pingüinos. F = MS_between / MS_within.</a:t>
             </a:r>
           </a:p>
         </p:txBody>
@@ -4932,7 +4932,349 @@
                 </a:solidFill>
                 <a:latin typeface="Courier New"/>
               </a:rPr>
-              <a:t># Imports y configuración inicial</a:t>
+              <a:t>import numpy as np</a:t>
+            </a:r>
+          </a:p>
+          <a:p>
+            <a:pPr>
+              <a:defRPr sz="1200" b="0">
+                <a:solidFill>
+                  <a:srgbClr val="F8FAFC"/>
+                </a:solidFill>
+                <a:latin typeface="Courier New"/>
+              </a:defRPr>
+            </a:pPr>
+            <a:r>
+              <a:rPr sz="1200" b="0">
+                <a:solidFill>
+                  <a:srgbClr val="F8FAFC"/>
+                </a:solidFill>
+                <a:latin typeface="Courier New"/>
+              </a:rPr>
+              <a:t>import pandas as pd</a:t>
+            </a:r>
+          </a:p>
+          <a:p>
+            <a:pPr>
+              <a:defRPr sz="1200" b="0">
+                <a:solidFill>
+                  <a:srgbClr val="F8FAFC"/>
+                </a:solidFill>
+                <a:latin typeface="Courier New"/>
+              </a:defRPr>
+            </a:pPr>
+            <a:r>
+              <a:rPr sz="1200" b="0">
+                <a:solidFill>
+                  <a:srgbClr val="F8FAFC"/>
+                </a:solidFill>
+                <a:latin typeface="Courier New"/>
+              </a:rPr>
+              <a:t>from scipy import stats</a:t>
+            </a:r>
+          </a:p>
+          <a:p>
+            <a:pPr>
+              <a:defRPr sz="1200" b="0">
+                <a:solidFill>
+                  <a:srgbClr val="F8FAFC"/>
+                </a:solidFill>
+                <a:latin typeface="Courier New"/>
+              </a:defRPr>
+            </a:pPr>
+            <a:r>
+              <a:rPr sz="1200" b="0">
+                <a:solidFill>
+                  <a:srgbClr val="F8FAFC"/>
+                </a:solidFill>
+                <a:latin typeface="Courier New"/>
+              </a:rPr>
+              <a:t>import statsmodels.formula.api as smf</a:t>
+            </a:r>
+          </a:p>
+          <a:p>
+            <a:pPr>
+              <a:defRPr sz="1200" b="0">
+                <a:solidFill>
+                  <a:srgbClr val="F8FAFC"/>
+                </a:solidFill>
+                <a:latin typeface="Courier New"/>
+              </a:defRPr>
+            </a:pPr>
+            <a:r>
+              <a:rPr sz="1200" b="0">
+                <a:solidFill>
+                  <a:srgbClr val="F8FAFC"/>
+                </a:solidFill>
+                <a:latin typeface="Courier New"/>
+              </a:rPr>
+              <a:t>from statsmodels.stats.anova import anova_lm</a:t>
+            </a:r>
+          </a:p>
+          <a:p>
+            <a:pPr>
+              <a:defRPr sz="1200" b="0">
+                <a:solidFill>
+                  <a:srgbClr val="F8FAFC"/>
+                </a:solidFill>
+                <a:latin typeface="Courier New"/>
+              </a:defRPr>
+            </a:pPr>
+            <a:r>
+              <a:rPr sz="1200" b="0">
+                <a:solidFill>
+                  <a:srgbClr val="F8FAFC"/>
+                </a:solidFill>
+                <a:latin typeface="Courier New"/>
+              </a:rPr>
+              <a:t>from statsmodels.stats.multicomp import pairwise_tukeyhsd</a:t>
+            </a:r>
+          </a:p>
+          <a:p>
+            <a:pPr>
+              <a:defRPr sz="1200" b="0">
+                <a:solidFill>
+                  <a:srgbClr val="F8FAFC"/>
+                </a:solidFill>
+                <a:latin typeface="Courier New"/>
+              </a:defRPr>
+            </a:pPr>
+            <a:r>
+              <a:rPr sz="1200" b="0">
+                <a:solidFill>
+                  <a:srgbClr val="F8FAFC"/>
+                </a:solidFill>
+                <a:latin typeface="Courier New"/>
+              </a:rPr>
+              <a:t>import matplotlib.pyplot as plt</a:t>
+            </a:r>
+          </a:p>
+          <a:p>
+            <a:pPr>
+              <a:defRPr sz="1200" b="0">
+                <a:solidFill>
+                  <a:srgbClr val="F8FAFC"/>
+                </a:solidFill>
+                <a:latin typeface="Courier New"/>
+              </a:defRPr>
+            </a:pPr>
+            <a:r>
+              <a:rPr sz="1200" b="0">
+                <a:solidFill>
+                  <a:srgbClr val="F8FAFC"/>
+                </a:solidFill>
+                <a:latin typeface="Courier New"/>
+              </a:rPr>
+              <a:t> </a:t>
+            </a:r>
+          </a:p>
+          <a:p>
+            <a:pPr>
+              <a:defRPr sz="1200" b="0">
+                <a:solidFill>
+                  <a:srgbClr val="F8FAFC"/>
+                </a:solidFill>
+                <a:latin typeface="Courier New"/>
+              </a:defRPr>
+            </a:pPr>
+            <a:r>
+              <a:rPr sz="1200" b="0">
+                <a:solidFill>
+                  <a:srgbClr val="F8FAFC"/>
+                </a:solidFill>
+                <a:latin typeface="Courier New"/>
+              </a:rPr>
+              <a:t>rng = np.random.default_rng(42)</a:t>
+            </a:r>
+          </a:p>
+          <a:p>
+            <a:pPr>
+              <a:defRPr sz="1200" b="0">
+                <a:solidFill>
+                  <a:srgbClr val="F8FAFC"/>
+                </a:solidFill>
+                <a:latin typeface="Courier New"/>
+              </a:defRPr>
+            </a:pPr>
+            <a:r>
+              <a:rPr sz="1200" b="0">
+                <a:solidFill>
+                  <a:srgbClr val="F8FAFC"/>
+                </a:solidFill>
+                <a:latin typeface="Courier New"/>
+              </a:rPr>
+              <a:t> </a:t>
+            </a:r>
+          </a:p>
+          <a:p>
+            <a:pPr>
+              <a:defRPr sz="1200" b="0">
+                <a:solidFill>
+                  <a:srgbClr val="F8FAFC"/>
+                </a:solidFill>
+                <a:latin typeface="Courier New"/>
+              </a:defRPr>
+            </a:pPr>
+            <a:r>
+              <a:rPr sz="1200" b="0">
+                <a:solidFill>
+                  <a:srgbClr val="F8FAFC"/>
+                </a:solidFill>
+                <a:latin typeface="Courier New"/>
+              </a:rPr>
+              <a:t>adelie    = rng.normal(3700, 460, 150)</a:t>
+            </a:r>
+          </a:p>
+          <a:p>
+            <a:pPr>
+              <a:defRPr sz="1200" b="0">
+                <a:solidFill>
+                  <a:srgbClr val="F8FAFC"/>
+                </a:solidFill>
+                <a:latin typeface="Courier New"/>
+              </a:defRPr>
+            </a:pPr>
+            <a:r>
+              <a:rPr sz="1200" b="0">
+                <a:solidFill>
+                  <a:srgbClr val="F8FAFC"/>
+                </a:solidFill>
+                <a:latin typeface="Courier New"/>
+              </a:rPr>
+              <a:t>gentoo    = rng.normal(5080, 500, 120)</a:t>
+            </a:r>
+          </a:p>
+          <a:p>
+            <a:pPr>
+              <a:defRPr sz="1200" b="0">
+                <a:solidFill>
+                  <a:srgbClr val="F8FAFC"/>
+                </a:solidFill>
+                <a:latin typeface="Courier New"/>
+              </a:defRPr>
+            </a:pPr>
+            <a:r>
+              <a:rPr sz="1200" b="0">
+                <a:solidFill>
+                  <a:srgbClr val="F8FAFC"/>
+                </a:solidFill>
+                <a:latin typeface="Courier New"/>
+              </a:rPr>
+              <a:t>chinstrap = rng.normal(3730, 380, 68)</a:t>
+            </a:r>
+          </a:p>
+          <a:p>
+            <a:pPr>
+              <a:defRPr sz="1200" b="0">
+                <a:solidFill>
+                  <a:srgbClr val="F8FAFC"/>
+                </a:solidFill>
+                <a:latin typeface="Courier New"/>
+              </a:defRPr>
+            </a:pPr>
+            <a:r>
+              <a:rPr sz="1200" b="0">
+                <a:solidFill>
+                  <a:srgbClr val="F8FAFC"/>
+                </a:solidFill>
+                <a:latin typeface="Courier New"/>
+              </a:rPr>
+              <a:t>F, p = stats.f_oneway(adelie, gentoo, chinstrap)</a:t>
+            </a:r>
+          </a:p>
+          <a:p>
+            <a:pPr>
+              <a:defRPr sz="1200" b="0">
+                <a:solidFill>
+                  <a:srgbClr val="F8FAFC"/>
+                </a:solidFill>
+                <a:latin typeface="Courier New"/>
+              </a:defRPr>
+            </a:pPr>
+            <a:r>
+              <a:rPr sz="1200" b="0">
+                <a:solidFill>
+                  <a:srgbClr val="F8FAFC"/>
+                </a:solidFill>
+                <a:latin typeface="Courier New"/>
+              </a:rPr>
+              <a:t>k = 3</a:t>
+            </a:r>
+          </a:p>
+          <a:p>
+            <a:pPr>
+              <a:defRPr sz="1200" b="0">
+                <a:solidFill>
+                  <a:srgbClr val="F8FAFC"/>
+                </a:solidFill>
+                <a:latin typeface="Courier New"/>
+              </a:defRPr>
+            </a:pPr>
+            <a:r>
+              <a:rPr sz="1200" b="0">
+                <a:solidFill>
+                  <a:srgbClr val="F8FAFC"/>
+                </a:solidFill>
+                <a:latin typeface="Courier New"/>
+              </a:rPr>
+              <a:t>N = len(adelie) + len(gentoo) + len(chinstrap)</a:t>
+            </a:r>
+          </a:p>
+          <a:p>
+            <a:pPr>
+              <a:defRPr sz="1200" b="0">
+                <a:solidFill>
+                  <a:srgbClr val="F8FAFC"/>
+                </a:solidFill>
+                <a:latin typeface="Courier New"/>
+              </a:defRPr>
+            </a:pPr>
+            <a:r>
+              <a:rPr sz="1200" b="0">
+                <a:solidFill>
+                  <a:srgbClr val="F8FAFC"/>
+                </a:solidFill>
+                <a:latin typeface="Courier New"/>
+              </a:rPr>
+              <a:t>print(f"One-way ANOVA: F={F:.2f}  p={p:.2e}")</a:t>
+            </a:r>
+          </a:p>
+          <a:p>
+            <a:pPr>
+              <a:defRPr sz="1200" b="0">
+                <a:solidFill>
+                  <a:srgbClr val="F8FAFC"/>
+                </a:solidFill>
+                <a:latin typeface="Courier New"/>
+              </a:defRPr>
+            </a:pPr>
+            <a:r>
+              <a:rPr sz="1200" b="0">
+                <a:solidFill>
+                  <a:srgbClr val="F8FAFC"/>
+                </a:solidFill>
+                <a:latin typeface="Courier New"/>
+              </a:rPr>
+              <a:t>print(f"gl_between={k-1}  gl_within={N-k}")</a:t>
+            </a:r>
+          </a:p>
+          <a:p>
+            <a:pPr>
+              <a:defRPr sz="1200" b="0">
+                <a:solidFill>
+                  <a:srgbClr val="F8FAFC"/>
+                </a:solidFill>
+                <a:latin typeface="Courier New"/>
+              </a:defRPr>
+            </a:pPr>
+            <a:r>
+              <a:rPr sz="1200" b="0">
+                <a:solidFill>
+                  <a:srgbClr val="F8FAFC"/>
+                </a:solidFill>
+                <a:latin typeface="Courier New"/>
+              </a:rPr>
+              <a:t>assert p &lt; 0.001</a:t>
             </a:r>
           </a:p>
         </p:txBody>

--- a/classes/parte-3-estadistica-inferencial/179-anova-one-way-two-way/clase-179-anova-one-way-two-way-presentacion.pptx
+++ b/classes/parte-3-estadistica-inferencial/179-anova-one-way-two-way/clase-179-anova-one-way-two-way-presentacion.pptx
@@ -3272,7 +3272,7 @@
                 </a:solidFill>
                 <a:latin typeface="Segoe UI"/>
               </a:rPr>
-              <a:t>Parte: 3 — Estadística Inferencial y Causal · Fuente: ISLP, cap. 13 + Bruce &amp; Bruce, cap. 3 ANOVA.  Duración estimada: 80 min.</a:t>
+              <a:t>Parte: 3 — Estadística Inferencial y Causal · Fuente: ISLP, cap. 13 + Bruce &amp; Bruce, cap. 3 ANOVA.  Duración estimada: 80 min. · Nivel: Intermedio-Avanzado</a:t>
             </a:r>
           </a:p>
         </p:txBody>
@@ -3581,7 +3581,7 @@
                 </a:solidFill>
                 <a:latin typeface="Segoe UI"/>
               </a:rPr>
-              <a:t>Parte: 3 — Estadística Inferencial y Causal · Fuente: ISLP, cap. 13 + Bruce &amp; Bruce, cap. 3 ANOVA.  Duración estimada: 80 min.</a:t>
+              <a:t>Parte: 3 — Estadística Inferencial y Causal · Fuente: ISLP, cap. 13 + Bruce &amp; Bruce, cap. 3 ANOVA.  Duración estimada: 80 min. · Nivel: Intermedio-Avanzado</a:t>
             </a:r>
           </a:p>
         </p:txBody>
